--- a/CESIZen_Soutenance.pptx
+++ b/CESIZen_Soutenance.pptx
@@ -7678,7 +7678,7 @@
                 </a:solidFill>
                 <a:latin typeface="Arial"/>
               </a:rPr>
-              <a:t>•  Hiérarchie : 7 émotions de base + 28 sous-émotions.</a:t>
+              <a:t>•  Hiérarchie : 7 émotions de base + 33 sous-émotions.</a:t>
             </a:r>
           </a:p>
         </p:txBody>
@@ -9955,7 +9955,7 @@
                 </a:solidFill>
                 <a:latin typeface="Arial"/>
               </a:rPr>
-              <a:t>•  Hiérarchie configurable par l'admin : 7 émotions + 28 sous-émotions.</a:t>
+              <a:t>•  Hiérarchie configurable par l'admin : 7 émotions + 33 sous-émotions.</a:t>
             </a:r>
           </a:p>
           <a:p>

--- a/CESIZen_Soutenance.pptx
+++ b/CESIZen_Soutenance.pptx
@@ -4593,7 +4593,7 @@
                 </a:solidFill>
                 <a:latin typeface="Arial"/>
               </a:rPr>
-              <a:t>•  Chiffrement en transit (HTTPS/TLS 1.3) et au repos (AES-256).</a:t>
+              <a:t>•  Chiffrement en transit (HTTPS/TLS 1.3) ; bcrypt sur les mots de passe, AES-256 au repos prévu en prod HDS.</a:t>
             </a:r>
           </a:p>
           <a:p>
@@ -7678,7 +7678,7 @@
                 </a:solidFill>
                 <a:latin typeface="Arial"/>
               </a:rPr>
-              <a:t>•  Hiérarchie : 7 émotions de base + 33 sous-émotions.</a:t>
+              <a:t>•  Hiérarchie : 6 émotions de base + 36 sous-émotions (référentiel du sujet).</a:t>
             </a:r>
           </a:p>
         </p:txBody>
@@ -9955,7 +9955,7 @@
                 </a:solidFill>
                 <a:latin typeface="Arial"/>
               </a:rPr>
-              <a:t>•  Hiérarchie configurable par l'admin : 7 émotions + 33 sous-émotions.</a:t>
+              <a:t>•  Hiérarchie configurable par l'admin : 6 émotions + 36 sous-émotions.</a:t>
             </a:r>
           </a:p>
           <a:p>
